--- a/UI.pptx
+++ b/UI.pptx
@@ -107,6 +107,11 @@
       </a:defRPr>
     </a:lvl9pPr>
   </p:defaultTextStyle>
+  <p:extLst>
+    <p:ext uri="{EFAFB233-063F-42B5-8137-9DF3F51BA10A}">
+      <p15:sldGuideLst xmlns:p15="http://schemas.microsoft.com/office/powerpoint/2012/main"/>
+    </p:ext>
+  </p:extLst>
 </p:presentation>
 </file>
 
@@ -192,7 +197,7 @@
           <a:p>
             <a:fld id="{785C4AB5-B0D6-410A-A14B-4CE7710EA04C}" type="datetimeFigureOut">
               <a:rPr lang="en-US" smtClean="0"/>
-              <a:t>04/24/26</a:t>
+              <a:t>04/28/26</a:t>
             </a:fld>
             <a:endParaRPr lang="en-US"/>
           </a:p>
@@ -690,7 +695,7 @@
           <a:p>
             <a:fld id="{7ABBECF5-4670-436C-B824-E7D087F43982}" type="datetimeFigureOut">
               <a:rPr lang="en-US" smtClean="0"/>
-              <a:t>04/24/26</a:t>
+              <a:t>04/28/26</a:t>
             </a:fld>
             <a:endParaRPr lang="en-US"/>
           </a:p>
@@ -888,7 +893,7 @@
           <a:p>
             <a:fld id="{7ABBECF5-4670-436C-B824-E7D087F43982}" type="datetimeFigureOut">
               <a:rPr lang="en-US" smtClean="0"/>
-              <a:t>04/24/26</a:t>
+              <a:t>04/28/26</a:t>
             </a:fld>
             <a:endParaRPr lang="en-US"/>
           </a:p>
@@ -1096,7 +1101,7 @@
           <a:p>
             <a:fld id="{7ABBECF5-4670-436C-B824-E7D087F43982}" type="datetimeFigureOut">
               <a:rPr lang="en-US" smtClean="0"/>
-              <a:t>04/24/26</a:t>
+              <a:t>04/28/26</a:t>
             </a:fld>
             <a:endParaRPr lang="en-US"/>
           </a:p>
@@ -1294,7 +1299,7 @@
           <a:p>
             <a:fld id="{7ABBECF5-4670-436C-B824-E7D087F43982}" type="datetimeFigureOut">
               <a:rPr lang="en-US" smtClean="0"/>
-              <a:t>04/24/26</a:t>
+              <a:t>04/28/26</a:t>
             </a:fld>
             <a:endParaRPr lang="en-US"/>
           </a:p>
@@ -1569,7 +1574,7 @@
           <a:p>
             <a:fld id="{7ABBECF5-4670-436C-B824-E7D087F43982}" type="datetimeFigureOut">
               <a:rPr lang="en-US" smtClean="0"/>
-              <a:t>04/24/26</a:t>
+              <a:t>04/28/26</a:t>
             </a:fld>
             <a:endParaRPr lang="en-US"/>
           </a:p>
@@ -1834,7 +1839,7 @@
           <a:p>
             <a:fld id="{7ABBECF5-4670-436C-B824-E7D087F43982}" type="datetimeFigureOut">
               <a:rPr lang="en-US" smtClean="0"/>
-              <a:t>04/24/26</a:t>
+              <a:t>04/28/26</a:t>
             </a:fld>
             <a:endParaRPr lang="en-US"/>
           </a:p>
@@ -2246,7 +2251,7 @@
           <a:p>
             <a:fld id="{7ABBECF5-4670-436C-B824-E7D087F43982}" type="datetimeFigureOut">
               <a:rPr lang="en-US" smtClean="0"/>
-              <a:t>04/24/26</a:t>
+              <a:t>04/28/26</a:t>
             </a:fld>
             <a:endParaRPr lang="en-US"/>
           </a:p>
@@ -2387,7 +2392,7 @@
           <a:p>
             <a:fld id="{7ABBECF5-4670-436C-B824-E7D087F43982}" type="datetimeFigureOut">
               <a:rPr lang="en-US" smtClean="0"/>
-              <a:t>04/24/26</a:t>
+              <a:t>04/28/26</a:t>
             </a:fld>
             <a:endParaRPr lang="en-US"/>
           </a:p>
@@ -2500,7 +2505,7 @@
           <a:p>
             <a:fld id="{7ABBECF5-4670-436C-B824-E7D087F43982}" type="datetimeFigureOut">
               <a:rPr lang="en-US" smtClean="0"/>
-              <a:t>04/24/26</a:t>
+              <a:t>04/28/26</a:t>
             </a:fld>
             <a:endParaRPr lang="en-US"/>
           </a:p>
@@ -2811,7 +2816,7 @@
           <a:p>
             <a:fld id="{7ABBECF5-4670-436C-B824-E7D087F43982}" type="datetimeFigureOut">
               <a:rPr lang="en-US" smtClean="0"/>
-              <a:t>04/24/26</a:t>
+              <a:t>04/28/26</a:t>
             </a:fld>
             <a:endParaRPr lang="en-US"/>
           </a:p>
@@ -3099,7 +3104,7 @@
           <a:p>
             <a:fld id="{7ABBECF5-4670-436C-B824-E7D087F43982}" type="datetimeFigureOut">
               <a:rPr lang="en-US" smtClean="0"/>
-              <a:t>04/24/26</a:t>
+              <a:t>04/28/26</a:t>
             </a:fld>
             <a:endParaRPr lang="en-US"/>
           </a:p>
@@ -3340,7 +3345,7 @@
           <a:p>
             <a:fld id="{7ABBECF5-4670-436C-B824-E7D087F43982}" type="datetimeFigureOut">
               <a:rPr lang="en-US" smtClean="0"/>
-              <a:t>04/24/26</a:t>
+              <a:t>04/28/26</a:t>
             </a:fld>
             <a:endParaRPr lang="en-US"/>
           </a:p>
@@ -3772,7 +3777,7 @@
         <p:spPr>
           <a:xfrm>
             <a:off x="125507" y="806820"/>
-            <a:ext cx="7996517" cy="5432611"/>
+            <a:ext cx="6149787" cy="5432611"/>
           </a:xfrm>
           <a:prstGeom prst="rect">
             <a:avLst/>
@@ -3802,55 +3807,6 @@
             <a:r>
               <a:rPr lang="en-US"/>
               <a:t>View CAD</a:t>
-            </a:r>
-          </a:p>
-        </p:txBody>
-      </p:sp>
-      <p:sp>
-        <p:nvSpPr>
-          <p:cNvPr id="5" name="Rectangle 4">
-            <a:extLst>
-              <a:ext uri="{FF2B5EF4-FFF2-40B4-BE49-F238E27FC236}">
-                <a16:creationId xmlns:a16="http://schemas.microsoft.com/office/drawing/2014/main" id="{976B5DD3-2092-D2FA-47C4-AA106B72D737}"/>
-              </a:ext>
-            </a:extLst>
-          </p:cNvPr>
-          <p:cNvSpPr/>
-          <p:nvPr/>
-        </p:nvSpPr>
-        <p:spPr>
-          <a:xfrm>
-            <a:off x="8242781" y="806820"/>
-            <a:ext cx="3823712" cy="5432611"/>
-          </a:xfrm>
-          <a:prstGeom prst="rect">
-            <a:avLst/>
-          </a:prstGeom>
-        </p:spPr>
-        <p:style>
-          <a:lnRef idx="2">
-            <a:schemeClr val="accent1">
-              <a:shade val="15000"/>
-            </a:schemeClr>
-          </a:lnRef>
-          <a:fillRef idx="1">
-            <a:schemeClr val="accent1"/>
-          </a:fillRef>
-          <a:effectRef idx="0">
-            <a:schemeClr val="accent1"/>
-          </a:effectRef>
-          <a:fontRef idx="minor">
-            <a:schemeClr val="lt1"/>
-          </a:fontRef>
-        </p:style>
-        <p:txBody>
-          <a:bodyPr rtlCol="0" anchor="ctr"/>
-          <a:lstStyle/>
-          <a:p>
-            <a:pPr algn="ctr"/>
-            <a:r>
-              <a:rPr lang="en-US"/>
-              <a:t>Bảng toạ độ các điểm của cad</a:t>
             </a:r>
           </a:p>
         </p:txBody>
@@ -4849,7 +4805,7 @@
         </p:nvSpPr>
         <p:spPr>
           <a:xfrm>
-            <a:off x="4421273" y="954743"/>
+            <a:off x="225791" y="3961269"/>
             <a:ext cx="3485032" cy="646331"/>
           </a:xfrm>
           <a:prstGeom prst="rect">
@@ -4881,49 +4837,6 @@
           </a:p>
         </p:txBody>
       </p:sp>
-      <p:cxnSp>
-        <p:nvCxnSpPr>
-          <p:cNvPr id="41" name="Straight Connector 40">
-            <a:extLst>
-              <a:ext uri="{FF2B5EF4-FFF2-40B4-BE49-F238E27FC236}">
-                <a16:creationId xmlns:a16="http://schemas.microsoft.com/office/drawing/2014/main" id="{31FDC3BB-A794-C8B0-D9B3-59819E382113}"/>
-              </a:ext>
-            </a:extLst>
-          </p:cNvPr>
-          <p:cNvCxnSpPr>
-            <a:cxnSpLocks/>
-          </p:cNvCxnSpPr>
-          <p:nvPr/>
-        </p:nvCxnSpPr>
-        <p:spPr>
-          <a:xfrm>
-            <a:off x="8242781" y="3881714"/>
-            <a:ext cx="3823712" cy="0"/>
-          </a:xfrm>
-          <a:prstGeom prst="line">
-            <a:avLst/>
-          </a:prstGeom>
-          <a:ln>
-            <a:solidFill>
-              <a:schemeClr val="tx1"/>
-            </a:solidFill>
-          </a:ln>
-        </p:spPr>
-        <p:style>
-          <a:lnRef idx="2">
-            <a:schemeClr val="accent1"/>
-          </a:lnRef>
-          <a:fillRef idx="0">
-            <a:schemeClr val="accent1"/>
-          </a:fillRef>
-          <a:effectRef idx="1">
-            <a:schemeClr val="accent1"/>
-          </a:effectRef>
-          <a:fontRef idx="minor">
-            <a:schemeClr val="tx1"/>
-          </a:fontRef>
-        </p:style>
-      </p:cxnSp>
       <p:graphicFrame>
         <p:nvGraphicFramePr>
           <p:cNvPr id="45" name="Table 44">
@@ -4939,14 +4852,14 @@
           <p:nvPr>
             <p:extLst>
               <p:ext uri="{D42A27DB-BD31-4B8C-83A1-F6EECF244321}">
-                <p14:modId xmlns:p14="http://schemas.microsoft.com/office/powerpoint/2010/main" val="3672335188"/>
+                <p14:modId xmlns:p14="http://schemas.microsoft.com/office/powerpoint/2010/main" val="2299198245"/>
               </p:ext>
             </p:extLst>
           </p:nvPr>
         </p:nvGraphicFramePr>
         <p:xfrm>
-          <a:off x="8257235" y="3961269"/>
-          <a:ext cx="3809256" cy="999552"/>
+          <a:off x="6345898" y="3801030"/>
+          <a:ext cx="5720592" cy="966808"/>
         </p:xfrm>
         <a:graphic>
           <a:graphicData uri="http://schemas.openxmlformats.org/drawingml/2006/table">
@@ -4955,42 +4868,42 @@
                 <a:tableStyleId>{5C22544A-7EE6-4342-B048-85BDC9FD1C3A}</a:tableStyleId>
               </a:tblPr>
               <a:tblGrid>
-                <a:gridCol w="634876">
+                <a:gridCol w="953432">
                   <a:extLst>
                     <a:ext uri="{9D8B030D-6E8A-4147-A177-3AD203B41FA5}">
                       <a16:colId xmlns:a16="http://schemas.microsoft.com/office/drawing/2014/main" val="4220796407"/>
                     </a:ext>
                   </a:extLst>
                 </a:gridCol>
-                <a:gridCol w="634876">
+                <a:gridCol w="953432">
                   <a:extLst>
                     <a:ext uri="{9D8B030D-6E8A-4147-A177-3AD203B41FA5}">
                       <a16:colId xmlns:a16="http://schemas.microsoft.com/office/drawing/2014/main" val="2709503273"/>
                     </a:ext>
                   </a:extLst>
                 </a:gridCol>
-                <a:gridCol w="634876">
+                <a:gridCol w="953432">
                   <a:extLst>
                     <a:ext uri="{9D8B030D-6E8A-4147-A177-3AD203B41FA5}">
                       <a16:colId xmlns:a16="http://schemas.microsoft.com/office/drawing/2014/main" val="1805821605"/>
                     </a:ext>
                   </a:extLst>
                 </a:gridCol>
-                <a:gridCol w="634876">
+                <a:gridCol w="953432">
                   <a:extLst>
                     <a:ext uri="{9D8B030D-6E8A-4147-A177-3AD203B41FA5}">
                       <a16:colId xmlns:a16="http://schemas.microsoft.com/office/drawing/2014/main" val="98096387"/>
                     </a:ext>
                   </a:extLst>
                 </a:gridCol>
-                <a:gridCol w="634876">
+                <a:gridCol w="953432">
                   <a:extLst>
                     <a:ext uri="{9D8B030D-6E8A-4147-A177-3AD203B41FA5}">
                       <a16:colId xmlns:a16="http://schemas.microsoft.com/office/drawing/2014/main" val="1177100421"/>
                     </a:ext>
                   </a:extLst>
                 </a:gridCol>
-                <a:gridCol w="634876">
+                <a:gridCol w="953432">
                   <a:extLst>
                     <a:ext uri="{9D8B030D-6E8A-4147-A177-3AD203B41FA5}">
                       <a16:colId xmlns:a16="http://schemas.microsoft.com/office/drawing/2014/main" val="2005200453"/>
@@ -4998,7 +4911,7 @@
                   </a:extLst>
                 </a:gridCol>
               </a:tblGrid>
-              <a:tr h="512158">
+              <a:tr h="487457">
                 <a:tc>
                   <a:txBody>
                     <a:bodyPr/>
@@ -5097,6 +5010,15 @@
                         <a:t>Toạ độ cuối</a:t>
                       </a:r>
                     </a:p>
+                    <a:p>
+                      <a:r>
+                        <a:rPr lang="en-US" sz="900">
+                          <a:latin typeface="Arial" panose="020B0604020202020204" pitchFamily="34" charset="0"/>
+                          <a:cs typeface="Arial" panose="020B0604020202020204" pitchFamily="34" charset="0"/>
+                        </a:rPr>
+                        <a:t>(X;Y)</a:t>
+                      </a:r>
+                    </a:p>
                   </a:txBody>
                   <a:tcPr/>
                 </a:tc>
@@ -5113,6 +5035,38 @@
                         <a:t>Toạ độ tâm</a:t>
                       </a:r>
                     </a:p>
+                    <a:p>
+                      <a:pPr marL="0" marR="0" lvl="0" indent="0" algn="l" defTabSz="914400" rtl="0" eaLnBrk="1" fontAlgn="auto" latinLnBrk="0" hangingPunct="1">
+                        <a:lnSpc>
+                          <a:spcPct val="100000"/>
+                        </a:lnSpc>
+                        <a:spcBef>
+                          <a:spcPts val="0"/>
+                        </a:spcBef>
+                        <a:spcAft>
+                          <a:spcPts val="0"/>
+                        </a:spcAft>
+                        <a:buClrTx/>
+                        <a:buSzTx/>
+                        <a:buFontTx/>
+                        <a:buNone/>
+                        <a:tabLst/>
+                        <a:defRPr/>
+                      </a:pPr>
+                      <a:r>
+                        <a:rPr lang="en-US" sz="900">
+                          <a:latin typeface="Arial" panose="020B0604020202020204" pitchFamily="34" charset="0"/>
+                          <a:cs typeface="Arial" panose="020B0604020202020204" pitchFamily="34" charset="0"/>
+                        </a:rPr>
+                        <a:t>(X;Y)</a:t>
+                      </a:r>
+                    </a:p>
+                    <a:p>
+                      <a:endParaRPr lang="en-US" sz="900">
+                        <a:latin typeface="Arial" panose="020B0604020202020204" pitchFamily="34" charset="0"/>
+                        <a:cs typeface="Arial" panose="020B0604020202020204" pitchFamily="34" charset="0"/>
+                      </a:endParaRPr>
+                    </a:p>
                   </a:txBody>
                   <a:tcPr/>
                 </a:tc>
@@ -5122,7 +5076,7 @@
                   </a:ext>
                 </a:extLst>
               </a:tr>
-              <a:tr h="243697">
+              <a:tr h="231944">
                 <a:tc>
                   <a:txBody>
                     <a:bodyPr/>
@@ -5207,7 +5161,7 @@
                   </a:ext>
                 </a:extLst>
               </a:tr>
-              <a:tr h="243697">
+              <a:tr h="231944">
                 <a:tc>
                   <a:txBody>
                     <a:bodyPr/>
@@ -5412,14 +5366,14 @@
           <p:nvPr>
             <p:extLst>
               <p:ext uri="{D42A27DB-BD31-4B8C-83A1-F6EECF244321}">
-                <p14:modId xmlns:p14="http://schemas.microsoft.com/office/powerpoint/2010/main" val="1968402455"/>
+                <p14:modId xmlns:p14="http://schemas.microsoft.com/office/powerpoint/2010/main" val="2659734237"/>
               </p:ext>
             </p:extLst>
           </p:nvPr>
         </p:nvGraphicFramePr>
         <p:xfrm>
-          <a:off x="8335921" y="892465"/>
-          <a:ext cx="3637432" cy="2493685"/>
+          <a:off x="6465014" y="913755"/>
+          <a:ext cx="5601478" cy="2478151"/>
         </p:xfrm>
         <a:graphic>
           <a:graphicData uri="http://schemas.openxmlformats.org/drawingml/2006/table">
@@ -5428,43 +5382,57 @@
                 <a:tableStyleId>{5C22544A-7EE6-4342-B048-85BDC9FD1C3A}</a:tableStyleId>
               </a:tblPr>
               <a:tblGrid>
-                <a:gridCol w="517713">
+                <a:gridCol w="483391">
                   <a:extLst>
                     <a:ext uri="{9D8B030D-6E8A-4147-A177-3AD203B41FA5}">
                       <a16:colId xmlns:a16="http://schemas.microsoft.com/office/drawing/2014/main" val="210683280"/>
                     </a:ext>
                   </a:extLst>
                 </a:gridCol>
-                <a:gridCol w="1301003">
+                <a:gridCol w="941041">
                   <a:extLst>
                     <a:ext uri="{9D8B030D-6E8A-4147-A177-3AD203B41FA5}">
                       <a16:colId xmlns:a16="http://schemas.microsoft.com/office/drawing/2014/main" val="442896853"/>
                     </a:ext>
                   </a:extLst>
                 </a:gridCol>
-                <a:gridCol w="909358">
+                <a:gridCol w="826578">
                   <a:extLst>
                     <a:ext uri="{9D8B030D-6E8A-4147-A177-3AD203B41FA5}">
                       <a16:colId xmlns:a16="http://schemas.microsoft.com/office/drawing/2014/main" val="3614424627"/>
                     </a:ext>
                   </a:extLst>
                 </a:gridCol>
-                <a:gridCol w="909358">
+                <a:gridCol w="638244">
                   <a:extLst>
                     <a:ext uri="{9D8B030D-6E8A-4147-A177-3AD203B41FA5}">
                       <a16:colId xmlns:a16="http://schemas.microsoft.com/office/drawing/2014/main" val="2080121114"/>
                     </a:ext>
                   </a:extLst>
                 </a:gridCol>
+                <a:gridCol w="1356112">
+                  <a:extLst>
+                    <a:ext uri="{9D8B030D-6E8A-4147-A177-3AD203B41FA5}">
+                      <a16:colId xmlns:a16="http://schemas.microsoft.com/office/drawing/2014/main" val="2922677216"/>
+                    </a:ext>
+                  </a:extLst>
+                </a:gridCol>
+                <a:gridCol w="1356112">
+                  <a:extLst>
+                    <a:ext uri="{9D8B030D-6E8A-4147-A177-3AD203B41FA5}">
+                      <a16:colId xmlns:a16="http://schemas.microsoft.com/office/drawing/2014/main" val="393528544"/>
+                    </a:ext>
+                  </a:extLst>
+                </a:gridCol>
               </a:tblGrid>
-              <a:tr h="508993">
+              <a:tr h="897116">
                 <a:tc>
                   <a:txBody>
                     <a:bodyPr/>
                     <a:lstStyle/>
                     <a:p>
                       <a:r>
-                        <a:rPr lang="en-US"/>
+                        <a:rPr lang="en-US" sz="1400"/>
                         <a:t>STT</a:t>
                       </a:r>
                     </a:p>
@@ -5477,7 +5445,7 @@
                     <a:lstStyle/>
                     <a:p>
                       <a:r>
-                        <a:rPr lang="en-US"/>
+                        <a:rPr lang="en-US" sz="1400"/>
                         <a:t>Loại đường</a:t>
                       </a:r>
                     </a:p>
@@ -5490,7 +5458,7 @@
                     <a:lstStyle/>
                     <a:p>
                       <a:r>
-                        <a:rPr lang="en-US"/>
+                        <a:rPr lang="en-US" sz="1400"/>
                         <a:t>Toạ độ X</a:t>
                       </a:r>
                     </a:p>
@@ -5503,8 +5471,34 @@
                     <a:lstStyle/>
                     <a:p>
                       <a:r>
-                        <a:rPr lang="en-US"/>
+                        <a:rPr lang="en-US" sz="1400"/>
                         <a:t>Toạ độ Y</a:t>
+                      </a:r>
+                    </a:p>
+                  </a:txBody>
+                  <a:tcPr/>
+                </a:tc>
+                <a:tc>
+                  <a:txBody>
+                    <a:bodyPr/>
+                    <a:lstStyle/>
+                    <a:p>
+                      <a:r>
+                        <a:rPr lang="en-US" sz="1400"/>
+                        <a:t>Toạ độ tâm theo X</a:t>
+                      </a:r>
+                    </a:p>
+                  </a:txBody>
+                  <a:tcPr/>
+                </a:tc>
+                <a:tc>
+                  <a:txBody>
+                    <a:bodyPr/>
+                    <a:lstStyle/>
+                    <a:p>
+                      <a:r>
+                        <a:rPr lang="en-US" sz="1400"/>
+                        <a:t>Toạ độ tâm theo Y </a:t>
                       </a:r>
                     </a:p>
                   </a:txBody>
@@ -5516,13 +5510,13 @@
                   </a:ext>
                 </a:extLst>
               </a:tr>
-              <a:tr h="370721">
+              <a:tr h="316207">
                 <a:tc>
                   <a:txBody>
                     <a:bodyPr/>
                     <a:lstStyle/>
                     <a:p>
-                      <a:endParaRPr lang="en-US"/>
+                      <a:endParaRPr lang="en-US" sz="1400"/>
                     </a:p>
                   </a:txBody>
                   <a:tcPr/>
@@ -5532,7 +5526,7 @@
                     <a:bodyPr/>
                     <a:lstStyle/>
                     <a:p>
-                      <a:endParaRPr lang="en-US"/>
+                      <a:endParaRPr lang="en-US" sz="1400"/>
                     </a:p>
                   </a:txBody>
                   <a:tcPr/>
@@ -5542,7 +5536,7 @@
                     <a:bodyPr/>
                     <a:lstStyle/>
                     <a:p>
-                      <a:endParaRPr lang="en-US"/>
+                      <a:endParaRPr lang="en-US" sz="1400"/>
                     </a:p>
                   </a:txBody>
                   <a:tcPr/>
@@ -5552,7 +5546,27 @@
                     <a:bodyPr/>
                     <a:lstStyle/>
                     <a:p>
-                      <a:endParaRPr lang="en-US"/>
+                      <a:endParaRPr lang="en-US" sz="1400"/>
+                    </a:p>
+                  </a:txBody>
+                  <a:tcPr/>
+                </a:tc>
+                <a:tc>
+                  <a:txBody>
+                    <a:bodyPr/>
+                    <a:lstStyle/>
+                    <a:p>
+                      <a:endParaRPr lang="en-US" sz="1400"/>
+                    </a:p>
+                  </a:txBody>
+                  <a:tcPr/>
+                </a:tc>
+                <a:tc>
+                  <a:txBody>
+                    <a:bodyPr/>
+                    <a:lstStyle/>
+                    <a:p>
+                      <a:endParaRPr lang="en-US" sz="1400"/>
                     </a:p>
                   </a:txBody>
                   <a:tcPr/>
@@ -5563,13 +5577,13 @@
                   </a:ext>
                 </a:extLst>
               </a:tr>
-              <a:tr h="370721">
+              <a:tr h="316207">
                 <a:tc>
                   <a:txBody>
                     <a:bodyPr/>
                     <a:lstStyle/>
                     <a:p>
-                      <a:endParaRPr lang="en-US"/>
+                      <a:endParaRPr lang="en-US" sz="1400"/>
                     </a:p>
                   </a:txBody>
                   <a:tcPr/>
@@ -5579,7 +5593,7 @@
                     <a:bodyPr/>
                     <a:lstStyle/>
                     <a:p>
-                      <a:endParaRPr lang="en-US"/>
+                      <a:endParaRPr lang="en-US" sz="1400"/>
                     </a:p>
                   </a:txBody>
                   <a:tcPr/>
@@ -5589,7 +5603,7 @@
                     <a:bodyPr/>
                     <a:lstStyle/>
                     <a:p>
-                      <a:endParaRPr lang="en-US"/>
+                      <a:endParaRPr lang="en-US" sz="1400"/>
                     </a:p>
                   </a:txBody>
                   <a:tcPr/>
@@ -5599,7 +5613,27 @@
                     <a:bodyPr/>
                     <a:lstStyle/>
                     <a:p>
-                      <a:endParaRPr lang="en-US"/>
+                      <a:endParaRPr lang="en-US" sz="1400"/>
+                    </a:p>
+                  </a:txBody>
+                  <a:tcPr/>
+                </a:tc>
+                <a:tc>
+                  <a:txBody>
+                    <a:bodyPr/>
+                    <a:lstStyle/>
+                    <a:p>
+                      <a:endParaRPr lang="en-US" sz="1400"/>
+                    </a:p>
+                  </a:txBody>
+                  <a:tcPr/>
+                </a:tc>
+                <a:tc>
+                  <a:txBody>
+                    <a:bodyPr/>
+                    <a:lstStyle/>
+                    <a:p>
+                      <a:endParaRPr lang="en-US" sz="1400"/>
                     </a:p>
                   </a:txBody>
                   <a:tcPr/>
@@ -5610,13 +5644,13 @@
                   </a:ext>
                 </a:extLst>
               </a:tr>
-              <a:tr h="370721">
+              <a:tr h="316207">
                 <a:tc>
                   <a:txBody>
                     <a:bodyPr/>
                     <a:lstStyle/>
                     <a:p>
-                      <a:endParaRPr lang="en-US"/>
+                      <a:endParaRPr lang="en-US" sz="1400"/>
                     </a:p>
                   </a:txBody>
                   <a:tcPr/>
@@ -5626,7 +5660,7 @@
                     <a:bodyPr/>
                     <a:lstStyle/>
                     <a:p>
-                      <a:endParaRPr lang="en-US"/>
+                      <a:endParaRPr lang="en-US" sz="1400"/>
                     </a:p>
                   </a:txBody>
                   <a:tcPr/>
@@ -5636,7 +5670,7 @@
                     <a:bodyPr/>
                     <a:lstStyle/>
                     <a:p>
-                      <a:endParaRPr lang="en-US"/>
+                      <a:endParaRPr lang="en-US" sz="1400"/>
                     </a:p>
                   </a:txBody>
                   <a:tcPr/>
@@ -5646,7 +5680,27 @@
                     <a:bodyPr/>
                     <a:lstStyle/>
                     <a:p>
-                      <a:endParaRPr lang="en-US"/>
+                      <a:endParaRPr lang="en-US" sz="1400"/>
+                    </a:p>
+                  </a:txBody>
+                  <a:tcPr/>
+                </a:tc>
+                <a:tc>
+                  <a:txBody>
+                    <a:bodyPr/>
+                    <a:lstStyle/>
+                    <a:p>
+                      <a:endParaRPr lang="en-US" sz="1400"/>
+                    </a:p>
+                  </a:txBody>
+                  <a:tcPr/>
+                </a:tc>
+                <a:tc>
+                  <a:txBody>
+                    <a:bodyPr/>
+                    <a:lstStyle/>
+                    <a:p>
+                      <a:endParaRPr lang="en-US" sz="1400"/>
                     </a:p>
                   </a:txBody>
                   <a:tcPr/>
@@ -5657,13 +5711,13 @@
                   </a:ext>
                 </a:extLst>
               </a:tr>
-              <a:tr h="370721">
+              <a:tr h="316207">
                 <a:tc>
                   <a:txBody>
                     <a:bodyPr/>
                     <a:lstStyle/>
                     <a:p>
-                      <a:endParaRPr lang="en-US"/>
+                      <a:endParaRPr lang="en-US" sz="1400"/>
                     </a:p>
                   </a:txBody>
                   <a:tcPr/>
@@ -5673,7 +5727,7 @@
                     <a:bodyPr/>
                     <a:lstStyle/>
                     <a:p>
-                      <a:endParaRPr lang="en-US"/>
+                      <a:endParaRPr lang="en-US" sz="1400"/>
                     </a:p>
                   </a:txBody>
                   <a:tcPr/>
@@ -5683,7 +5737,7 @@
                     <a:bodyPr/>
                     <a:lstStyle/>
                     <a:p>
-                      <a:endParaRPr lang="en-US"/>
+                      <a:endParaRPr lang="en-US" sz="1400"/>
                     </a:p>
                   </a:txBody>
                   <a:tcPr/>
@@ -5693,7 +5747,27 @@
                     <a:bodyPr/>
                     <a:lstStyle/>
                     <a:p>
-                      <a:endParaRPr lang="en-US"/>
+                      <a:endParaRPr lang="en-US" sz="1400"/>
+                    </a:p>
+                  </a:txBody>
+                  <a:tcPr/>
+                </a:tc>
+                <a:tc>
+                  <a:txBody>
+                    <a:bodyPr/>
+                    <a:lstStyle/>
+                    <a:p>
+                      <a:endParaRPr lang="en-US" sz="1400"/>
+                    </a:p>
+                  </a:txBody>
+                  <a:tcPr/>
+                </a:tc>
+                <a:tc>
+                  <a:txBody>
+                    <a:bodyPr/>
+                    <a:lstStyle/>
+                    <a:p>
+                      <a:endParaRPr lang="en-US" sz="1400"/>
                     </a:p>
                   </a:txBody>
                   <a:tcPr/>
@@ -5704,13 +5778,13 @@
                   </a:ext>
                 </a:extLst>
               </a:tr>
-              <a:tr h="370721">
+              <a:tr h="316207">
                 <a:tc>
                   <a:txBody>
                     <a:bodyPr/>
                     <a:lstStyle/>
                     <a:p>
-                      <a:endParaRPr lang="en-US"/>
+                      <a:endParaRPr lang="en-US" sz="1400"/>
                     </a:p>
                   </a:txBody>
                   <a:tcPr/>
@@ -5720,7 +5794,7 @@
                     <a:bodyPr/>
                     <a:lstStyle/>
                     <a:p>
-                      <a:endParaRPr lang="en-US"/>
+                      <a:endParaRPr lang="en-US" sz="1400"/>
                     </a:p>
                   </a:txBody>
                   <a:tcPr/>
@@ -5730,7 +5804,7 @@
                     <a:bodyPr/>
                     <a:lstStyle/>
                     <a:p>
-                      <a:endParaRPr lang="en-US"/>
+                      <a:endParaRPr lang="en-US" sz="1400"/>
                     </a:p>
                   </a:txBody>
                   <a:tcPr/>
@@ -5740,7 +5814,27 @@
                     <a:bodyPr/>
                     <a:lstStyle/>
                     <a:p>
-                      <a:endParaRPr lang="en-US"/>
+                      <a:endParaRPr lang="en-US" sz="1400"/>
+                    </a:p>
+                  </a:txBody>
+                  <a:tcPr/>
+                </a:tc>
+                <a:tc>
+                  <a:txBody>
+                    <a:bodyPr/>
+                    <a:lstStyle/>
+                    <a:p>
+                      <a:endParaRPr lang="en-US" sz="1400"/>
+                    </a:p>
+                  </a:txBody>
+                  <a:tcPr/>
+                </a:tc>
+                <a:tc>
+                  <a:txBody>
+                    <a:bodyPr/>
+                    <a:lstStyle/>
+                    <a:p>
+                      <a:endParaRPr lang="en-US" sz="1400"/>
                     </a:p>
                   </a:txBody>
                   <a:tcPr/>
@@ -5755,6 +5849,169 @@
           </a:graphicData>
         </a:graphic>
       </p:graphicFrame>
+      <p:sp>
+        <p:nvSpPr>
+          <p:cNvPr id="2" name="TextBox 1">
+            <a:extLst>
+              <a:ext uri="{FF2B5EF4-FFF2-40B4-BE49-F238E27FC236}">
+                <a16:creationId xmlns:a16="http://schemas.microsoft.com/office/drawing/2014/main" id="{FA1E4F0E-9DA0-1230-FF98-44372F3F21CE}"/>
+              </a:ext>
+            </a:extLst>
+          </p:cNvPr>
+          <p:cNvSpPr txBox="1"/>
+          <p:nvPr/>
+        </p:nvSpPr>
+        <p:spPr>
+          <a:xfrm>
+            <a:off x="225791" y="4896248"/>
+            <a:ext cx="3485032" cy="646331"/>
+          </a:xfrm>
+          <a:prstGeom prst="rect">
+            <a:avLst/>
+          </a:prstGeom>
+          <a:solidFill>
+            <a:schemeClr val="accent4">
+              <a:lumMod val="60000"/>
+              <a:lumOff val="40000"/>
+            </a:schemeClr>
+          </a:solidFill>
+        </p:spPr>
+        <p:txBody>
+          <a:bodyPr wrap="square" rtlCol="0">
+            <a:spAutoFit/>
+          </a:bodyPr>
+          <a:lstStyle/>
+          <a:p>
+            <a:r>
+              <a:rPr lang="en-US"/>
+              <a:t>Loại đường chỉ cần ghi là cung trong hay đường thẳng </a:t>
+            </a:r>
+          </a:p>
+        </p:txBody>
+      </p:sp>
+      <p:sp>
+        <p:nvSpPr>
+          <p:cNvPr id="7" name="TextBox 6">
+            <a:extLst>
+              <a:ext uri="{FF2B5EF4-FFF2-40B4-BE49-F238E27FC236}">
+                <a16:creationId xmlns:a16="http://schemas.microsoft.com/office/drawing/2014/main" id="{E58ED27C-CCC7-5F08-D206-DA632CCB13E4}"/>
+              </a:ext>
+            </a:extLst>
+          </p:cNvPr>
+          <p:cNvSpPr txBox="1"/>
+          <p:nvPr/>
+        </p:nvSpPr>
+        <p:spPr>
+          <a:xfrm>
+            <a:off x="6354732" y="4767838"/>
+            <a:ext cx="2987613" cy="923330"/>
+          </a:xfrm>
+          <a:prstGeom prst="rect">
+            <a:avLst/>
+          </a:prstGeom>
+          <a:noFill/>
+        </p:spPr>
+        <p:txBody>
+          <a:bodyPr wrap="none" rtlCol="0">
+            <a:spAutoFit/>
+          </a:bodyPr>
+          <a:lstStyle/>
+          <a:p>
+            <a:r>
+              <a:rPr lang="en-US"/>
+              <a:t>Giá trị M code </a:t>
+            </a:r>
+          </a:p>
+          <a:p>
+            <a:r>
+              <a:rPr lang="en-US"/>
+              <a:t>M code =  1 là bật bơm keo </a:t>
+            </a:r>
+          </a:p>
+          <a:p>
+            <a:r>
+              <a:rPr lang="en-US"/>
+              <a:t>M code = 2 là dừng bơm keo </a:t>
+            </a:r>
+          </a:p>
+        </p:txBody>
+      </p:sp>
+      <p:sp>
+        <p:nvSpPr>
+          <p:cNvPr id="8" name="TextBox 7">
+            <a:extLst>
+              <a:ext uri="{FF2B5EF4-FFF2-40B4-BE49-F238E27FC236}">
+                <a16:creationId xmlns:a16="http://schemas.microsoft.com/office/drawing/2014/main" id="{DF45A021-7B27-2197-9EAA-302273CA291C}"/>
+              </a:ext>
+            </a:extLst>
+          </p:cNvPr>
+          <p:cNvSpPr txBox="1"/>
+          <p:nvPr/>
+        </p:nvSpPr>
+        <p:spPr>
+          <a:xfrm>
+            <a:off x="9186283" y="4821799"/>
+            <a:ext cx="2680542" cy="646331"/>
+          </a:xfrm>
+          <a:prstGeom prst="rect">
+            <a:avLst/>
+          </a:prstGeom>
+          <a:noFill/>
+        </p:spPr>
+        <p:txBody>
+          <a:bodyPr wrap="none" rtlCol="0">
+            <a:spAutoFit/>
+          </a:bodyPr>
+          <a:lstStyle/>
+          <a:p>
+            <a:r>
+              <a:rPr lang="en-US"/>
+              <a:t>Đảm báo 2 bẳng này nhìn</a:t>
+            </a:r>
+          </a:p>
+          <a:p>
+            <a:r>
+              <a:rPr lang="en-US"/>
+              <a:t> được hết dữ liệu</a:t>
+            </a:r>
+          </a:p>
+        </p:txBody>
+      </p:sp>
+      <p:sp>
+        <p:nvSpPr>
+          <p:cNvPr id="12" name="TextBox 11">
+            <a:extLst>
+              <a:ext uri="{FF2B5EF4-FFF2-40B4-BE49-F238E27FC236}">
+                <a16:creationId xmlns:a16="http://schemas.microsoft.com/office/drawing/2014/main" id="{3B33EAC4-ED3E-3CFB-8A3D-525D5A6C733E}"/>
+              </a:ext>
+            </a:extLst>
+          </p:cNvPr>
+          <p:cNvSpPr txBox="1"/>
+          <p:nvPr/>
+        </p:nvSpPr>
+        <p:spPr>
+          <a:xfrm>
+            <a:off x="291608" y="141663"/>
+            <a:ext cx="2231701" cy="369332"/>
+          </a:xfrm>
+          <a:prstGeom prst="rect">
+            <a:avLst/>
+          </a:prstGeom>
+          <a:noFill/>
+        </p:spPr>
+        <p:txBody>
+          <a:bodyPr wrap="none" rtlCol="0">
+            <a:spAutoFit/>
+          </a:bodyPr>
+          <a:lstStyle/>
+          <a:p>
+            <a:r>
+              <a:rPr lang="en-US"/>
+              <a:t>Phần này làm nhỏ lại</a:t>
+            </a:r>
+          </a:p>
+        </p:txBody>
+      </p:sp>
     </p:spTree>
     <p:extLst>
       <p:ext uri="{BB962C8B-B14F-4D97-AF65-F5344CB8AC3E}">
